--- a/examples/ppt/shapes/shapes-typography.pptx
+++ b/examples/ppt/shapes/shapes-typography.pptx
@@ -5,10 +5,11 @@
     <p:sldMasterId xmlns:r="http://schemas.openxmlformats.org/officeDocument/2006/relationships" id="2147483648" r:id="rId1"/>
   </p:sldMasterIdLst>
   <p:sldIdLst>
-    <p:sldId id="256" r:id="R5589533f33d546c7"/>
-    <p:sldId id="257" r:id="R29283dee2e7c402f"/>
-    <p:sldId id="258" r:id="Rcce358e26ac348be"/>
-    <p:sldId id="259" r:id="Rba2527572d404f59"/>
+    <p:sldId id="256" r:id="R581bb09194b847e3"/>
+    <p:sldId id="257" r:id="Rd212a1199b47454b"/>
+    <p:sldId id="258" r:id="Rb3fb7321dbbb4cc9"/>
+    <p:sldId id="259" r:id="Rb6dc1d599c5f434e"/>
+    <p:sldId id="260" r:id="R00ca9e016eb54da6"/>
   </p:sldIdLst>
   <p:sldSz cx="12192000" cy="6858000"/>
   <p:notesSz cx="6858000" cy="9144000"/>
@@ -317,8 +318,8 @@
       <p:grpSpPr/>
       <p:sp>
         <p:nvSpPr>
-          <p:cNvPr id="10000" name="TextBox 1"/>
-          <p:cNvSpPr/>
+          <p:cNvPr id="100000" name="TextBox 1"/>
+          <p:cNvSpPr txBox="1"/>
           <p:nvPr/>
         </p:nvSpPr>
         <p:spPr>
@@ -343,8 +344,8 @@
       </p:sp>
       <p:sp>
         <p:nvSpPr>
-          <p:cNvPr id="10001" name="TextBox 2"/>
-          <p:cNvSpPr/>
+          <p:cNvPr id="100001" name="TextBox 2"/>
+          <p:cNvSpPr txBox="1"/>
           <p:nvPr/>
         </p:nvSpPr>
         <p:spPr>
@@ -369,14 +370,12 @@
             </a:r>
           </a:p>
           <a:p xmlns:a="http://schemas.openxmlformats.org/drawingml/2006/main">
-            <a:pPr/>
             <a:r>
               <a:rPr lang="en-US"/>
               <a:t>Lorem ipsum dolor sit amet, consectetur adipiscing elit. Sed do eiusmod tempor incididunt.</a:t>
             </a:r>
           </a:p>
           <a:p xmlns:a="http://schemas.openxmlformats.org/drawingml/2006/main">
-            <a:pPr/>
             <a:r>
               <a:rPr lang="en-US"/>
               <a:t>Lorem ipsum dolor sit amet, consectetur adipiscing elit. Sed do eiusmod tempor incididunt.</a:t>
@@ -386,8 +385,8 @@
       </p:sp>
       <p:sp>
         <p:nvSpPr>
-          <p:cNvPr id="10002" name="TextBox 3"/>
-          <p:cNvSpPr/>
+          <p:cNvPr id="100002" name="TextBox 3"/>
+          <p:cNvSpPr txBox="1"/>
           <p:nvPr/>
         </p:nvSpPr>
         <p:spPr>
@@ -412,8 +411,8 @@
       </p:sp>
       <p:sp>
         <p:nvSpPr>
-          <p:cNvPr id="10003" name="TextBox 4"/>
-          <p:cNvSpPr/>
+          <p:cNvPr id="100003" name="TextBox 4"/>
+          <p:cNvSpPr txBox="1"/>
           <p:nvPr/>
         </p:nvSpPr>
         <p:spPr>
@@ -468,8 +467,8 @@
       </p:sp>
       <p:sp>
         <p:nvSpPr>
-          <p:cNvPr id="10004" name="TextBox 5"/>
-          <p:cNvSpPr/>
+          <p:cNvPr id="100004" name="TextBox 5"/>
+          <p:cNvSpPr txBox="1"/>
           <p:nvPr/>
         </p:nvSpPr>
         <p:spPr>
@@ -494,8 +493,8 @@
       </p:sp>
       <p:sp>
         <p:nvSpPr>
-          <p:cNvPr id="10005" name="TextBox 6"/>
-          <p:cNvSpPr/>
+          <p:cNvPr id="100005" name="TextBox 6"/>
+          <p:cNvSpPr txBox="1"/>
           <p:nvPr/>
         </p:nvSpPr>
         <p:spPr>
@@ -559,8 +558,8 @@
       </p:sp>
       <p:sp>
         <p:nvSpPr>
-          <p:cNvPr id="10006" name="TextBox 7"/>
-          <p:cNvSpPr/>
+          <p:cNvPr id="100006" name="TextBox 7"/>
+          <p:cNvSpPr txBox="1"/>
           <p:nvPr/>
         </p:nvSpPr>
         <p:spPr>
@@ -600,8 +599,8 @@
       <p:grpSpPr/>
       <p:sp>
         <p:nvSpPr>
-          <p:cNvPr id="10007" name="TextBox 1"/>
-          <p:cNvSpPr/>
+          <p:cNvPr id="100007" name="TextBox 1"/>
+          <p:cNvSpPr txBox="1"/>
           <p:nvPr/>
         </p:nvSpPr>
         <p:spPr>
@@ -626,8 +625,8 @@
       </p:sp>
       <p:sp>
         <p:nvSpPr>
-          <p:cNvPr id="10008" name="TextBox 2"/>
-          <p:cNvSpPr/>
+          <p:cNvPr id="100008" name="TextBox 2"/>
+          <p:cNvSpPr txBox="1"/>
           <p:nvPr/>
         </p:nvSpPr>
         <p:spPr>
@@ -652,8 +651,8 @@
       </p:sp>
       <p:sp>
         <p:nvSpPr>
-          <p:cNvPr id="10009" name="TextBox 3"/>
-          <p:cNvSpPr/>
+          <p:cNvPr id="100009" name="TextBox 3"/>
+          <p:cNvSpPr txBox="1"/>
           <p:nvPr/>
         </p:nvSpPr>
         <p:spPr>
@@ -678,8 +677,8 @@
       </p:sp>
       <p:sp>
         <p:nvSpPr>
-          <p:cNvPr id="10010" name="TextBox 4"/>
-          <p:cNvSpPr/>
+          <p:cNvPr id="100010" name="TextBox 4"/>
+          <p:cNvSpPr txBox="1"/>
           <p:nvPr/>
         </p:nvSpPr>
         <p:spPr>
@@ -704,8 +703,8 @@
       </p:sp>
       <p:sp>
         <p:nvSpPr>
-          <p:cNvPr id="10011" name="TextBox 5"/>
-          <p:cNvSpPr/>
+          <p:cNvPr id="100011" name="TextBox 5"/>
+          <p:cNvSpPr txBox="1"/>
           <p:nvPr/>
         </p:nvSpPr>
         <p:spPr>
@@ -730,8 +729,8 @@
       </p:sp>
       <p:sp>
         <p:nvSpPr>
-          <p:cNvPr id="10012" name="TextBox 6"/>
-          <p:cNvSpPr/>
+          <p:cNvPr id="100012" name="TextBox 6"/>
+          <p:cNvSpPr txBox="1"/>
           <p:nvPr/>
         </p:nvSpPr>
         <p:spPr>
@@ -756,8 +755,8 @@
       </p:sp>
       <p:sp>
         <p:nvSpPr>
-          <p:cNvPr id="10013" name="TextBox 7"/>
-          <p:cNvSpPr/>
+          <p:cNvPr id="100013" name="TextBox 7"/>
+          <p:cNvSpPr txBox="1"/>
           <p:nvPr/>
         </p:nvSpPr>
         <p:spPr>
@@ -782,8 +781,8 @@
       </p:sp>
       <p:sp>
         <p:nvSpPr>
-          <p:cNvPr id="10014" name="TextBox 8"/>
-          <p:cNvSpPr/>
+          <p:cNvPr id="100014" name="TextBox 8"/>
+          <p:cNvSpPr txBox="1"/>
           <p:nvPr/>
         </p:nvSpPr>
         <p:spPr>
@@ -808,8 +807,8 @@
       </p:sp>
       <p:sp>
         <p:nvSpPr>
-          <p:cNvPr id="10015" name="TextBox 9"/>
-          <p:cNvSpPr/>
+          <p:cNvPr id="100015" name="TextBox 9"/>
+          <p:cNvSpPr txBox="1"/>
           <p:nvPr/>
         </p:nvSpPr>
         <p:spPr>
@@ -834,8 +833,8 @@
       </p:sp>
       <p:sp>
         <p:nvSpPr>
-          <p:cNvPr id="10016" name="TextBox 10"/>
-          <p:cNvSpPr/>
+          <p:cNvPr id="100016" name="TextBox 10"/>
+          <p:cNvSpPr txBox="1"/>
           <p:nvPr/>
         </p:nvSpPr>
         <p:spPr>
@@ -875,8 +874,8 @@
       <p:grpSpPr/>
       <p:sp>
         <p:nvSpPr>
-          <p:cNvPr id="10017" name="TextBox 1"/>
-          <p:cNvSpPr/>
+          <p:cNvPr id="100017" name="TextBox 1"/>
+          <p:cNvSpPr txBox="1"/>
           <p:nvPr/>
         </p:nvSpPr>
         <p:spPr>
@@ -901,8 +900,8 @@
       </p:sp>
       <p:sp>
         <p:nvSpPr>
-          <p:cNvPr id="10018" name="TextBox 2"/>
-          <p:cNvSpPr/>
+          <p:cNvPr id="100018" name="TextBox 2"/>
+          <p:cNvSpPr txBox="1"/>
           <p:nvPr/>
         </p:nvSpPr>
         <p:spPr>
@@ -932,8 +931,8 @@
       </p:sp>
       <p:sp>
         <p:nvSpPr>
-          <p:cNvPr id="10019" name="TextBox 3"/>
-          <p:cNvSpPr/>
+          <p:cNvPr id="100019" name="TextBox 3"/>
+          <p:cNvSpPr txBox="1"/>
           <p:nvPr/>
         </p:nvSpPr>
         <p:spPr>
@@ -962,8 +961,8 @@
       </p:sp>
       <p:sp>
         <p:nvSpPr>
-          <p:cNvPr id="10020" name="TextBox 4"/>
-          <p:cNvSpPr/>
+          <p:cNvPr id="100020" name="TextBox 4"/>
+          <p:cNvSpPr txBox="1"/>
           <p:nvPr/>
         </p:nvSpPr>
         <p:spPr>
@@ -994,8 +993,8 @@
       </p:sp>
       <p:sp>
         <p:nvSpPr>
-          <p:cNvPr id="10021" name="TextBox 5"/>
-          <p:cNvSpPr/>
+          <p:cNvPr id="100021" name="TextBox 5"/>
+          <p:cNvSpPr txBox="1"/>
           <p:nvPr/>
         </p:nvSpPr>
         <p:spPr>
@@ -1024,8 +1023,8 @@
       </p:sp>
       <p:sp>
         <p:nvSpPr>
-          <p:cNvPr id="10022" name="TextBox 6"/>
-          <p:cNvSpPr/>
+          <p:cNvPr id="100022" name="TextBox 6"/>
+          <p:cNvSpPr txBox="1"/>
           <p:nvPr/>
         </p:nvSpPr>
         <p:spPr>
@@ -1056,8 +1055,8 @@
       </p:sp>
       <p:sp>
         <p:nvSpPr>
-          <p:cNvPr id="10023" name="TextBox 7"/>
-          <p:cNvSpPr/>
+          <p:cNvPr id="100023" name="TextBox 7"/>
+          <p:cNvSpPr txBox="1"/>
           <p:nvPr/>
         </p:nvSpPr>
         <p:spPr>
@@ -1101,8 +1100,8 @@
       <p:grpSpPr/>
       <p:sp>
         <p:nvSpPr>
-          <p:cNvPr id="10024" name="TextBox 1"/>
-          <p:cNvSpPr/>
+          <p:cNvPr id="100024" name="TextBox 1"/>
+          <p:cNvSpPr txBox="1"/>
           <p:nvPr/>
         </p:nvSpPr>
         <p:spPr>
@@ -1127,8 +1126,8 @@
       </p:sp>
       <p:sp>
         <p:nvSpPr>
-          <p:cNvPr id="10025" name="TextBox 2"/>
-          <p:cNvSpPr/>
+          <p:cNvPr id="100025" name="TextBox 2"/>
+          <p:cNvSpPr txBox="1"/>
           <p:nvPr/>
         </p:nvSpPr>
         <p:spPr>
@@ -1159,8 +1158,8 @@
       </p:sp>
       <p:sp>
         <p:nvSpPr>
-          <p:cNvPr id="10026" name="TextBox 3"/>
-          <p:cNvSpPr/>
+          <p:cNvPr id="100026" name="TextBox 3"/>
+          <p:cNvSpPr txBox="1"/>
           <p:nvPr/>
         </p:nvSpPr>
         <p:spPr>
@@ -1185,8 +1184,8 @@
       </p:sp>
       <p:sp>
         <p:nvSpPr>
-          <p:cNvPr id="10027" name="TextBox 4"/>
-          <p:cNvSpPr/>
+          <p:cNvPr id="100027" name="TextBox 4"/>
+          <p:cNvSpPr txBox="1"/>
           <p:nvPr/>
         </p:nvSpPr>
         <p:spPr>
@@ -1217,8 +1216,8 @@
       </p:sp>
       <p:sp>
         <p:nvSpPr>
-          <p:cNvPr id="10028" name="TextBox 5"/>
-          <p:cNvSpPr/>
+          <p:cNvPr id="100028" name="TextBox 5"/>
+          <p:cNvSpPr txBox="1"/>
           <p:nvPr/>
         </p:nvSpPr>
         <p:spPr>
@@ -1243,8 +1242,8 @@
       </p:sp>
       <p:sp>
         <p:nvSpPr>
-          <p:cNvPr id="10029" name="TextBox 6"/>
-          <p:cNvSpPr/>
+          <p:cNvPr id="100029" name="TextBox 6"/>
+          <p:cNvSpPr txBox="1"/>
           <p:nvPr/>
         </p:nvSpPr>
         <p:spPr>
@@ -1272,8 +1271,8 @@
       </p:sp>
       <p:sp>
         <p:nvSpPr>
-          <p:cNvPr id="10030" name="TextBox 7"/>
-          <p:cNvSpPr/>
+          <p:cNvPr id="100030" name="TextBox 7"/>
+          <p:cNvSpPr txBox="1"/>
           <p:nvPr/>
         </p:nvSpPr>
         <p:spPr>
@@ -1298,8 +1297,8 @@
       </p:sp>
       <p:sp>
         <p:nvSpPr>
-          <p:cNvPr id="10031" name="TextBox 8"/>
-          <p:cNvSpPr/>
+          <p:cNvPr id="100031" name="TextBox 8"/>
+          <p:cNvSpPr txBox="1"/>
           <p:nvPr/>
         </p:nvSpPr>
         <p:spPr>
@@ -1327,8 +1326,8 @@
       </p:sp>
       <p:sp>
         <p:nvSpPr>
-          <p:cNvPr id="10032" name="TextBox 9"/>
-          <p:cNvSpPr/>
+          <p:cNvPr id="100032" name="TextBox 9"/>
+          <p:cNvSpPr txBox="1"/>
           <p:nvPr/>
         </p:nvSpPr>
         <p:spPr>
@@ -1353,8 +1352,8 @@
       </p:sp>
       <p:sp>
         <p:nvSpPr>
-          <p:cNvPr id="10033" name="TextBox 10"/>
-          <p:cNvSpPr/>
+          <p:cNvPr id="100033" name="TextBox 10"/>
+          <p:cNvSpPr txBox="1"/>
           <p:nvPr/>
         </p:nvSpPr>
         <p:spPr>
@@ -1384,8 +1383,8 @@
       </p:sp>
       <p:sp>
         <p:nvSpPr>
-          <p:cNvPr id="10034" name="TextBox 11"/>
-          <p:cNvSpPr/>
+          <p:cNvPr id="100034" name="TextBox 11"/>
+          <p:cNvSpPr txBox="1"/>
           <p:nvPr/>
         </p:nvSpPr>
         <p:spPr>
@@ -1410,6 +1409,456 @@
       </p:sp>
     </p:spTree>
   </p:cSld>
+</p:sld>
+</file>
+
+<file path=ppt/slides/slide5.xml><?xml version="1.0" encoding="utf-8"?>
+<p:sld xmlns:p="http://schemas.openxmlformats.org/presentationml/2006/main">
+  <p:cSld>
+    <p:spTree>
+      <p:nvGrpSpPr>
+        <p:cNvPr id="1" name=""/>
+        <p:cNvGrpSpPr/>
+        <p:nvPr/>
+      </p:nvGrpSpPr>
+      <p:grpSpPr/>
+      <p:sp>
+        <p:nvSpPr>
+          <p:cNvPr id="100035" name="TextBox 1"/>
+          <p:cNvSpPr txBox="1"/>
+          <p:nvPr/>
+        </p:nvSpPr>
+        <p:spPr>
+          <a:xfrm xmlns:a="http://schemas.openxmlformats.org/drawingml/2006/main">
+            <a:off x="457200" y="274320"/>
+            <a:ext cx="11887200" cy="548640"/>
+          </a:xfrm>
+          <a:prstGeom xmlns:a="http://schemas.openxmlformats.org/drawingml/2006/main" prst="rect">
+            <a:avLst/>
+          </a:prstGeom>
+        </p:spPr>
+        <p:txBody>
+          <a:bodyPr xmlns:a="http://schemas.openxmlformats.org/drawingml/2006/main"/>
+          <a:lstStyle xmlns:a="http://schemas.openxmlformats.org/drawingml/2006/main"/>
+          <a:p xmlns:a="http://schemas.openxmlformats.org/drawingml/2006/main">
+            <a:r>
+              <a:rPr lang="en-US" sz="2200" b="1"/>
+              <a:t>strike / underline / valign / margin / list / lineOpacity / animation</a:t>
+            </a:r>
+          </a:p>
+        </p:txBody>
+      </p:sp>
+      <p:sp>
+        <p:nvSpPr>
+          <p:cNvPr id="100036" name="TextBox 2"/>
+          <p:cNvSpPr/>
+          <p:nvPr/>
+        </p:nvSpPr>
+        <p:spPr>
+          <a:xfrm xmlns:a="http://schemas.openxmlformats.org/drawingml/2006/main">
+            <a:off x="457200" y="1097280"/>
+            <a:ext cx="3200400" cy="1097280"/>
+          </a:xfrm>
+          <a:prstGeom xmlns:a="http://schemas.openxmlformats.org/drawingml/2006/main" prst="roundRect">
+            <a:avLst/>
+          </a:prstGeom>
+          <a:solidFill xmlns:a="http://schemas.openxmlformats.org/drawingml/2006/main">
+            <a:srgbClr val="F4A261"/>
+          </a:solidFill>
+        </p:spPr>
+        <p:txBody>
+          <a:bodyPr xmlns:a="http://schemas.openxmlformats.org/drawingml/2006/main"/>
+          <a:lstStyle xmlns:a="http://schemas.openxmlformats.org/drawingml/2006/main"/>
+          <a:p xmlns:a="http://schemas.openxmlformats.org/drawingml/2006/main">
+            <a:r>
+              <a:rPr lang="en-US" sz="1800" strike="sngStrike">
+                <a:solidFill>
+                  <a:srgbClr val="000000"/>
+                </a:solidFill>
+              </a:rPr>
+              <a:t>strike=single</a:t>
+            </a:r>
+          </a:p>
+        </p:txBody>
+      </p:sp>
+      <p:sp>
+        <p:nvSpPr>
+          <p:cNvPr id="100037" name="TextBox 3"/>
+          <p:cNvSpPr/>
+          <p:nvPr/>
+        </p:nvSpPr>
+        <p:spPr>
+          <a:xfrm xmlns:a="http://schemas.openxmlformats.org/drawingml/2006/main">
+            <a:off x="3931920" y="1097280"/>
+            <a:ext cx="3200400" cy="1097280"/>
+          </a:xfrm>
+          <a:prstGeom xmlns:a="http://schemas.openxmlformats.org/drawingml/2006/main" prst="roundRect">
+            <a:avLst/>
+          </a:prstGeom>
+          <a:solidFill xmlns:a="http://schemas.openxmlformats.org/drawingml/2006/main">
+            <a:srgbClr val="A8DADC"/>
+          </a:solidFill>
+        </p:spPr>
+        <p:txBody>
+          <a:bodyPr xmlns:a="http://schemas.openxmlformats.org/drawingml/2006/main"/>
+          <a:lstStyle xmlns:a="http://schemas.openxmlformats.org/drawingml/2006/main"/>
+          <a:p xmlns:a="http://schemas.openxmlformats.org/drawingml/2006/main">
+            <a:r>
+              <a:rPr lang="en-US" sz="1800" u="sng">
+                <a:solidFill>
+                  <a:srgbClr val="000000"/>
+                </a:solidFill>
+              </a:rPr>
+              <a:t>underline=single</a:t>
+            </a:r>
+          </a:p>
+        </p:txBody>
+      </p:sp>
+      <p:sp>
+        <p:nvSpPr>
+          <p:cNvPr id="100038" name="TextBox 4"/>
+          <p:cNvSpPr/>
+          <p:nvPr/>
+        </p:nvSpPr>
+        <p:spPr>
+          <a:xfrm xmlns:a="http://schemas.openxmlformats.org/drawingml/2006/main">
+            <a:off x="457200" y="2377440"/>
+            <a:ext cx="3200400" cy="1828800"/>
+          </a:xfrm>
+          <a:prstGeom xmlns:a="http://schemas.openxmlformats.org/drawingml/2006/main" prst="rect">
+            <a:avLst/>
+          </a:prstGeom>
+          <a:solidFill xmlns:a="http://schemas.openxmlformats.org/drawingml/2006/main">
+            <a:srgbClr val="DEEAF6"/>
+          </a:solidFill>
+          <a:ln xmlns:a="http://schemas.openxmlformats.org/drawingml/2006/main" w="25400">
+            <a:solidFill>
+              <a:srgbClr val="4472C4"/>
+            </a:solidFill>
+          </a:ln>
+        </p:spPr>
+        <p:txBody>
+          <a:bodyPr xmlns:a="http://schemas.openxmlformats.org/drawingml/2006/main" anchor="t"/>
+          <a:lstStyle xmlns:a="http://schemas.openxmlformats.org/drawingml/2006/main"/>
+          <a:p xmlns:a="http://schemas.openxmlformats.org/drawingml/2006/main">
+            <a:r>
+              <a:rPr lang="en-US" sz="1600" b="1"/>
+              <a:t>valign=top</a:t>
+            </a:r>
+          </a:p>
+        </p:txBody>
+      </p:sp>
+      <p:sp>
+        <p:nvSpPr>
+          <p:cNvPr id="100039" name="TextBox 5"/>
+          <p:cNvSpPr/>
+          <p:nvPr/>
+        </p:nvSpPr>
+        <p:spPr>
+          <a:xfrm xmlns:a="http://schemas.openxmlformats.org/drawingml/2006/main">
+            <a:off x="3931920" y="2377440"/>
+            <a:ext cx="3200400" cy="1828800"/>
+          </a:xfrm>
+          <a:prstGeom xmlns:a="http://schemas.openxmlformats.org/drawingml/2006/main" prst="rect">
+            <a:avLst/>
+          </a:prstGeom>
+          <a:solidFill xmlns:a="http://schemas.openxmlformats.org/drawingml/2006/main">
+            <a:srgbClr val="DEEAF6"/>
+          </a:solidFill>
+          <a:ln xmlns:a="http://schemas.openxmlformats.org/drawingml/2006/main" w="25400">
+            <a:solidFill>
+              <a:srgbClr val="4472C4"/>
+            </a:solidFill>
+          </a:ln>
+        </p:spPr>
+        <p:txBody>
+          <a:bodyPr xmlns:a="http://schemas.openxmlformats.org/drawingml/2006/main" anchor="ctr"/>
+          <a:lstStyle xmlns:a="http://schemas.openxmlformats.org/drawingml/2006/main"/>
+          <a:p xmlns:a="http://schemas.openxmlformats.org/drawingml/2006/main">
+            <a:r>
+              <a:rPr lang="en-US" sz="1600" b="1"/>
+              <a:t>valign=middle</a:t>
+            </a:r>
+          </a:p>
+        </p:txBody>
+      </p:sp>
+      <p:sp>
+        <p:nvSpPr>
+          <p:cNvPr id="100040" name="TextBox 6"/>
+          <p:cNvSpPr/>
+          <p:nvPr/>
+        </p:nvSpPr>
+        <p:spPr>
+          <a:xfrm xmlns:a="http://schemas.openxmlformats.org/drawingml/2006/main">
+            <a:off x="7406640" y="2377440"/>
+            <a:ext cx="3200400" cy="1828800"/>
+          </a:xfrm>
+          <a:prstGeom xmlns:a="http://schemas.openxmlformats.org/drawingml/2006/main" prst="rect">
+            <a:avLst/>
+          </a:prstGeom>
+          <a:solidFill xmlns:a="http://schemas.openxmlformats.org/drawingml/2006/main">
+            <a:srgbClr val="DEEAF6"/>
+          </a:solidFill>
+          <a:ln xmlns:a="http://schemas.openxmlformats.org/drawingml/2006/main" w="25400">
+            <a:solidFill>
+              <a:srgbClr val="4472C4"/>
+            </a:solidFill>
+          </a:ln>
+        </p:spPr>
+        <p:txBody>
+          <a:bodyPr xmlns:a="http://schemas.openxmlformats.org/drawingml/2006/main" anchor="b"/>
+          <a:lstStyle xmlns:a="http://schemas.openxmlformats.org/drawingml/2006/main"/>
+          <a:p xmlns:a="http://schemas.openxmlformats.org/drawingml/2006/main">
+            <a:r>
+              <a:rPr lang="en-US" sz="1600" b="1"/>
+              <a:t>valign=bottom</a:t>
+            </a:r>
+          </a:p>
+        </p:txBody>
+      </p:sp>
+      <p:sp>
+        <p:nvSpPr>
+          <p:cNvPr id="100041" name="TextBox 7"/>
+          <p:cNvSpPr/>
+          <p:nvPr/>
+        </p:nvSpPr>
+        <p:spPr>
+          <a:xfrm xmlns:a="http://schemas.openxmlformats.org/drawingml/2006/main">
+            <a:off x="457200" y="4480560"/>
+            <a:ext cx="4572000" cy="1280160"/>
+          </a:xfrm>
+          <a:prstGeom xmlns:a="http://schemas.openxmlformats.org/drawingml/2006/main" prst="roundRect">
+            <a:avLst/>
+          </a:prstGeom>
+          <a:solidFill xmlns:a="http://schemas.openxmlformats.org/drawingml/2006/main">
+            <a:srgbClr val="F1FAEE"/>
+          </a:solidFill>
+          <a:ln xmlns:a="http://schemas.openxmlformats.org/drawingml/2006/main" w="25400">
+            <a:solidFill>
+              <a:srgbClr val="2A9D8F"/>
+            </a:solidFill>
+          </a:ln>
+        </p:spPr>
+        <p:txBody>
+          <a:bodyPr xmlns:a="http://schemas.openxmlformats.org/drawingml/2006/main" lIns="365760" tIns="365760" rIns="365760" bIns="365760"/>
+          <a:lstStyle xmlns:a="http://schemas.openxmlformats.org/drawingml/2006/main"/>
+          <a:p xmlns:a="http://schemas.openxmlformats.org/drawingml/2006/main">
+            <a:r>
+              <a:rPr lang="en-US" sz="1600"/>
+              <a:t>margin=0.4in  — large inner padding</a:t>
+            </a:r>
+          </a:p>
+        </p:txBody>
+      </p:sp>
+      <p:sp>
+        <p:nvSpPr>
+          <p:cNvPr id="100042" name="TextBox 8"/>
+          <p:cNvSpPr/>
+          <p:nvPr/>
+        </p:nvSpPr>
+        <p:spPr>
+          <a:xfrm xmlns:a="http://schemas.openxmlformats.org/drawingml/2006/main">
+            <a:off x="5486400" y="4480560"/>
+            <a:ext cx="4114800" cy="2286000"/>
+          </a:xfrm>
+          <a:prstGeom xmlns:a="http://schemas.openxmlformats.org/drawingml/2006/main" prst="rect">
+            <a:avLst/>
+          </a:prstGeom>
+          <a:solidFill xmlns:a="http://schemas.openxmlformats.org/drawingml/2006/main">
+            <a:srgbClr val="F4A261"/>
+          </a:solidFill>
+        </p:spPr>
+        <p:txBody>
+          <a:bodyPr xmlns:a="http://schemas.openxmlformats.org/drawingml/2006/main"/>
+          <a:lstStyle xmlns:a="http://schemas.openxmlformats.org/drawingml/2006/main"/>
+          <a:p xmlns:a="http://schemas.openxmlformats.org/drawingml/2006/main">
+            <a:pPr marL="457200" indent="-457200">
+              <a:buChar char="•"/>
+            </a:pPr>
+            <a:r>
+              <a:rPr lang="en-US" sz="1400">
+                <a:solidFill>
+                  <a:srgbClr val="000000"/>
+                </a:solidFill>
+              </a:rPr>
+              <a:t>First item</a:t>
+            </a:r>
+          </a:p>
+          <a:p xmlns:a="http://schemas.openxmlformats.org/drawingml/2006/main">
+            <a:r>
+              <a:rPr lang="en-US"/>
+              <a:t>Second item</a:t>
+            </a:r>
+          </a:p>
+          <a:p xmlns:a="http://schemas.openxmlformats.org/drawingml/2006/main">
+            <a:r>
+              <a:rPr lang="en-US"/>
+              <a:t>Third item</a:t>
+            </a:r>
+          </a:p>
+        </p:txBody>
+      </p:sp>
+      <p:sp>
+        <p:nvSpPr>
+          <p:cNvPr id="100043" name="TextBox 9"/>
+          <p:cNvSpPr/>
+          <p:nvPr/>
+        </p:nvSpPr>
+        <p:spPr>
+          <a:xfrm xmlns:a="http://schemas.openxmlformats.org/drawingml/2006/main">
+            <a:off x="457200" y="5943600"/>
+            <a:ext cx="3200400" cy="914400"/>
+          </a:xfrm>
+          <a:prstGeom xmlns:a="http://schemas.openxmlformats.org/drawingml/2006/main" prst="rect">
+            <a:avLst/>
+          </a:prstGeom>
+          <a:solidFill xmlns:a="http://schemas.openxmlformats.org/drawingml/2006/main">
+            <a:srgbClr val="4472C4"/>
+          </a:solidFill>
+          <a:ln xmlns:a="http://schemas.openxmlformats.org/drawingml/2006/main" w="76200">
+            <a:solidFill>
+              <a:srgbClr val="E63946">
+                <a:alpha val="35000"/>
+              </a:srgbClr>
+            </a:solidFill>
+          </a:ln>
+        </p:spPr>
+        <p:txBody>
+          <a:bodyPr xmlns:a="http://schemas.openxmlformats.org/drawingml/2006/main"/>
+          <a:lstStyle xmlns:a="http://schemas.openxmlformats.org/drawingml/2006/main"/>
+          <a:p xmlns:a="http://schemas.openxmlformats.org/drawingml/2006/main">
+            <a:r>
+              <a:rPr lang="en-US" sz="1400">
+                <a:solidFill>
+                  <a:srgbClr val="FFFFFF"/>
+                </a:solidFill>
+              </a:rPr>
+              <a:t>lineOpacity=0.35</a:t>
+            </a:r>
+          </a:p>
+        </p:txBody>
+      </p:sp>
+      <p:sp>
+        <p:nvSpPr>
+          <p:cNvPr id="100044" name="TextBox 10"/>
+          <p:cNvSpPr/>
+          <p:nvPr/>
+        </p:nvSpPr>
+        <p:spPr>
+          <a:xfrm xmlns:a="http://schemas.openxmlformats.org/drawingml/2006/main">
+            <a:off x="3931920" y="5943600"/>
+            <a:ext cx="3200400" cy="914400"/>
+          </a:xfrm>
+          <a:prstGeom xmlns:a="http://schemas.openxmlformats.org/drawingml/2006/main" prst="roundRect">
+            <a:avLst/>
+          </a:prstGeom>
+          <a:solidFill xmlns:a="http://schemas.openxmlformats.org/drawingml/2006/main">
+            <a:srgbClr val="E63946"/>
+          </a:solidFill>
+        </p:spPr>
+        <p:txBody>
+          <a:bodyPr xmlns:a="http://schemas.openxmlformats.org/drawingml/2006/main"/>
+          <a:lstStyle xmlns:a="http://schemas.openxmlformats.org/drawingml/2006/main"/>
+          <a:p xmlns:a="http://schemas.openxmlformats.org/drawingml/2006/main">
+            <a:r>
+              <a:rPr lang="en-US" sz="1400" b="1">
+                <a:solidFill>
+                  <a:srgbClr val="FFFFFF"/>
+                </a:solidFill>
+              </a:rPr>
+              <a:t>animation=fadeIn</a:t>
+            </a:r>
+          </a:p>
+        </p:txBody>
+      </p:sp>
+    </p:spTree>
+  </p:cSld>
+  <p:timing>
+    <p:tnLst>
+      <p:par>
+        <p:cTn id="1" dur="indefinite" restart="never" nodeType="tmRoot">
+          <p:childTnLst>
+            <p:seq concurrent="1" nextAc="seek">
+              <p:cTn id="2" dur="indefinite" nodeType="mainSeq">
+                <p:childTnLst>
+                  <p:par>
+                    <p:cTn id="8" fill="hold">
+                      <p:stCondLst>
+                        <p:cond delay="indefinite"/>
+                      </p:stCondLst>
+                      <p:childTnLst>
+                        <p:par>
+                          <p:cTn id="7" fill="hold">
+                            <p:stCondLst>
+                              <p:cond delay="0"/>
+                            </p:stCondLst>
+                            <p:childTnLst>
+                              <p:par>
+                                <p:cTn id="3" presetID="10" presetClass="entr" presetSubtype="0" fill="hold" grpId="0" nodeType="clickEffect">
+                                  <p:stCondLst>
+                                    <p:cond delay="0"/>
+                                  </p:stCondLst>
+                                  <p:childTnLst>
+                                    <p:set>
+                                      <p:cBhvr>
+                                        <p:cTn id="4" dur="1" fill="hold">
+                                          <p:stCondLst>
+                                            <p:cond delay="0"/>
+                                          </p:stCondLst>
+                                        </p:cTn>
+                                        <p:tgtEl>
+                                          <p:spTgt spid="100044"/>
+                                        </p:tgtEl>
+                                        <p:attrNameLst>
+                                          <p:attrName>style.visibility</p:attrName>
+                                        </p:attrNameLst>
+                                      </p:cBhvr>
+                                      <p:to>
+                                        <p:strVal val="visible"/>
+                                      </p:to>
+                                    </p:set>
+                                    <p:animEffect transition="in" filter="fade">
+                                      <p:cBhvr>
+                                        <p:cTn id="5" dur="400"/>
+                                        <p:tgtEl>
+                                          <p:spTgt spid="100044"/>
+                                        </p:tgtEl>
+                                      </p:cBhvr>
+                                    </p:animEffect>
+                                  </p:childTnLst>
+                                </p:cTn>
+                              </p:par>
+                            </p:childTnLst>
+                          </p:cTn>
+                        </p:par>
+                      </p:childTnLst>
+                    </p:cTn>
+                  </p:par>
+                </p:childTnLst>
+              </p:cTn>
+              <p:prevCondLst>
+                <p:cond evt="onPrev" delay="0">
+                  <p:tgtEl>
+                    <p:sldTgt/>
+                  </p:tgtEl>
+                </p:cond>
+              </p:prevCondLst>
+              <p:nextCondLst>
+                <p:cond evt="onNext" delay="0">
+                  <p:tgtEl>
+                    <p:sldTgt/>
+                  </p:tgtEl>
+                </p:cond>
+              </p:nextCondLst>
+            </p:seq>
+          </p:childTnLst>
+        </p:cTn>
+      </p:par>
+    </p:tnLst>
+    <p:bldLst>
+      <p:bldP spid="100044" grpId="0"/>
+    </p:bldLst>
+  </p:timing>
 </p:sld>
 </file>
 

--- a/examples/ppt/shapes/shapes-typography.pptx
+++ b/examples/ppt/shapes/shapes-typography.pptx
@@ -5,11 +5,11 @@
     <p:sldMasterId xmlns:r="http://schemas.openxmlformats.org/officeDocument/2006/relationships" id="2147483648" r:id="rId1"/>
   </p:sldMasterIdLst>
   <p:sldIdLst>
-    <p:sldId id="256" r:id="R581bb09194b847e3"/>
-    <p:sldId id="257" r:id="Rd212a1199b47454b"/>
-    <p:sldId id="258" r:id="Rb3fb7321dbbb4cc9"/>
-    <p:sldId id="259" r:id="Rb6dc1d599c5f434e"/>
-    <p:sldId id="260" r:id="R00ca9e016eb54da6"/>
+    <p:sldId id="256" r:id="Rcccc3c4bbbb94b1f"/>
+    <p:sldId id="257" r:id="Rb72b08d31ac44224"/>
+    <p:sldId id="258" r:id="R3566f67345d04708"/>
+    <p:sldId id="259" r:id="R18d40ad920ea4a71"/>
+    <p:sldId id="260" r:id="Rd6ed120432774012"/>
   </p:sldIdLst>
   <p:sldSz cx="12192000" cy="6858000"/>
   <p:notesSz cx="6858000" cy="9144000"/>
@@ -1624,8 +1624,8 @@
         </p:nvSpPr>
         <p:spPr>
           <a:xfrm xmlns:a="http://schemas.openxmlformats.org/drawingml/2006/main">
-            <a:off x="457200" y="4480560"/>
-            <a:ext cx="4572000" cy="1280160"/>
+            <a:off x="457200" y="4389120"/>
+            <a:ext cx="3657600" cy="1188720"/>
           </a:xfrm>
           <a:prstGeom xmlns:a="http://schemas.openxmlformats.org/drawingml/2006/main" prst="roundRect">
             <a:avLst/>
@@ -1658,8 +1658,8 @@
         </p:nvSpPr>
         <p:spPr>
           <a:xfrm xmlns:a="http://schemas.openxmlformats.org/drawingml/2006/main">
-            <a:off x="5486400" y="4480560"/>
-            <a:ext cx="4114800" cy="2286000"/>
+            <a:off x="4572000" y="4389120"/>
+            <a:ext cx="3840480" cy="1371600"/>
           </a:xfrm>
           <a:prstGeom xmlns:a="http://schemas.openxmlformats.org/drawingml/2006/main" prst="rect">
             <a:avLst/>
@@ -1685,14 +1685,28 @@
             </a:r>
           </a:p>
           <a:p xmlns:a="http://schemas.openxmlformats.org/drawingml/2006/main">
-            <a:r>
-              <a:rPr lang="en-US"/>
+            <a:pPr marL="457200" indent="-457200">
+              <a:buChar char="•"/>
+            </a:pPr>
+            <a:r>
+              <a:rPr lang="en-US" sz="1400">
+                <a:solidFill>
+                  <a:srgbClr val="000000"/>
+                </a:solidFill>
+              </a:rPr>
               <a:t>Second item</a:t>
             </a:r>
           </a:p>
           <a:p xmlns:a="http://schemas.openxmlformats.org/drawingml/2006/main">
-            <a:r>
-              <a:rPr lang="en-US"/>
+            <a:pPr marL="457200" indent="-457200">
+              <a:buChar char="•"/>
+            </a:pPr>
+            <a:r>
+              <a:rPr lang="en-US" sz="1400">
+                <a:solidFill>
+                  <a:srgbClr val="000000"/>
+                </a:solidFill>
+              </a:rPr>
               <a:t>Third item</a:t>
             </a:r>
           </a:p>
@@ -1706,8 +1720,8 @@
         </p:nvSpPr>
         <p:spPr>
           <a:xfrm xmlns:a="http://schemas.openxmlformats.org/drawingml/2006/main">
-            <a:off x="457200" y="5943600"/>
-            <a:ext cx="3200400" cy="914400"/>
+            <a:off x="457200" y="5852160"/>
+            <a:ext cx="3657600" cy="868680"/>
           </a:xfrm>
           <a:prstGeom xmlns:a="http://schemas.openxmlformats.org/drawingml/2006/main" prst="rect">
             <a:avLst/>
@@ -1746,8 +1760,8 @@
         </p:nvSpPr>
         <p:spPr>
           <a:xfrm xmlns:a="http://schemas.openxmlformats.org/drawingml/2006/main">
-            <a:off x="3931920" y="5943600"/>
-            <a:ext cx="3200400" cy="914400"/>
+            <a:off x="4572000" y="5852160"/>
+            <a:ext cx="3840480" cy="868680"/>
           </a:xfrm>
           <a:prstGeom xmlns:a="http://schemas.openxmlformats.org/drawingml/2006/main" prst="roundRect">
             <a:avLst/>
